--- a/Saggy_Two_Interface_Methodology.pptx
+++ b/Saggy_Two_Interface_Methodology.pptx
@@ -3218,7 +3218,7 @@
                 </a:solidFill>
                 <a:latin typeface="Menlo"/>
               </a:rPr>
-              <a:t>PRODUCTION METHODOLOGY  ·  BUILD STATUS v2</a:t>
+              <a:t>PRODUCTION METHODOLOGY  ·  BUILD STATUS v3</a:t>
             </a:r>
           </a:p>
         </p:txBody>
@@ -3290,7 +3290,7 @@
               </a:rPr>
               <a:t>Original methodology (May 15) called for Phase 1 first.
 We built Phases 3 + 4 + part of 2 instead, and skipped Phase 1.
-This deck reconciles the plan with what is actually live.</a:t>
+v3: live on Vercel, strict TS green, duplicate leads now rejected.</a:t>
             </a:r>
           </a:p>
         </p:txBody>
@@ -3360,7 +3360,7 @@
                 </a:solidFill>
                 <a:latin typeface="Menlo"/>
               </a:rPr>
-              <a:t>Updated 2026-05-18  ·  next.js app router  ·  firecrawl scoring  ·  json-backed leads</a:t>
+              <a:t>Updated 2026-05-19  ·  vercel auto-deploy  ·  strict typescript  ·  dedup by email + name</a:t>
             </a:r>
           </a:p>
         </p:txBody>
@@ -7824,7 +7824,7 @@
                 </a:solidFill>
                 <a:latin typeface="Helvetica Neue"/>
               </a:rPr>
-              <a:t>Server-side audit at /api/audit.</a:t>
+              <a:t>tsconfig strict:true — discriminated unions narrow correctly.</a:t>
             </a:r>
           </a:p>
           <a:p>
@@ -7852,7 +7852,7 @@
                 </a:solidFill>
                 <a:latin typeface="Helvetica Neue"/>
               </a:rPr>
-              <a:t>Firecrawl LLM scoring (v2/scrape · json extract).</a:t>
+              <a:t>Server-side audit at /api/audit.</a:t>
             </a:r>
           </a:p>
           <a:p>
@@ -7880,7 +7880,7 @@
                 </a:solidFill>
                 <a:latin typeface="Helvetica Neue"/>
               </a:rPr>
-              <a:t>Local analyzer fallback (regex over fetched HTML).</a:t>
+              <a:t>Firecrawl LLM scoring (v2/scrape · json extract).</a:t>
             </a:r>
           </a:p>
           <a:p>
@@ -7908,7 +7908,7 @@
                 </a:solidFill>
                 <a:latin typeface="Helvetica Neue"/>
               </a:rPr>
-              <a:t>Seeded fallback for bot-blocked sites.</a:t>
+              <a:t>Local analyzer fallback (regex over fetched HTML).</a:t>
             </a:r>
           </a:p>
           <a:p>
@@ -7936,7 +7936,7 @@
                 </a:solidFill>
                 <a:latin typeface="Helvetica Neue"/>
               </a:rPr>
-              <a:t>24h disk cache at data/audit-cache.json.</a:t>
+              <a:t>Seeded fallback for bot-blocked sites.</a:t>
             </a:r>
           </a:p>
           <a:p>
@@ -7964,7 +7964,7 @@
                 </a:solidFill>
                 <a:latin typeface="Helvetica Neue"/>
               </a:rPr>
-              <a:t>Lead persistence /api/leads (POST · GET · DELETE).</a:t>
+              <a:t>24h disk cache at data/audit-cache.json.</a:t>
             </a:r>
           </a:p>
           <a:p>
@@ -7992,7 +7992,7 @@
                 </a:solidFill>
                 <a:latin typeface="Helvetica Neue"/>
               </a:rPr>
-              <a:t>Status workflow + PATCH /api/leads/[id].</a:t>
+              <a:t>Lead persistence /api/leads (POST · GET · DELETE).</a:t>
             </a:r>
           </a:p>
           <a:p>
@@ -8020,7 +8020,7 @@
                 </a:solidFill>
                 <a:latin typeface="Helvetica Neue"/>
               </a:rPr>
-              <a:t>Sales console with redesigned lead-detail modal.</a:t>
+              <a:t>Status workflow + PATCH /api/leads/[id].</a:t>
             </a:r>
           </a:p>
           <a:p>
@@ -8048,7 +8048,119 @@
                 </a:solidFill>
                 <a:latin typeface="Helvetica Neue"/>
               </a:rPr>
+              <a:t>Sales console with redesigned lead-detail modal.</a:t>
+            </a:r>
+          </a:p>
+          <a:p>
+            <a:pPr algn="l">
+              <a:lnSpc>
+                <a:spcPct val="118000"/>
+              </a:lnSpc>
+              <a:spcAft>
+                <a:spcPts val="600"/>
+              </a:spcAft>
+            </a:pPr>
+            <a:r>
+              <a:rPr sz="1250" b="1">
+                <a:solidFill>
+                  <a:srgbClr val="7CB342"/>
+                </a:solidFill>
+                <a:latin typeface="Menlo"/>
+              </a:rPr>
+              <a:t>→  </a:t>
+            </a:r>
+            <a:r>
+              <a:rPr sz="1250">
+                <a:solidFill>
+                  <a:srgbClr val="F5EFE0"/>
+                </a:solidFill>
+                <a:latin typeface="Helvetica Neue"/>
+              </a:rPr>
               <a:t>Trade-area volume varies by city + make.</a:t>
+            </a:r>
+          </a:p>
+          <a:p>
+            <a:pPr algn="l">
+              <a:lnSpc>
+                <a:spcPct val="118000"/>
+              </a:lnSpc>
+              <a:spcAft>
+                <a:spcPts val="600"/>
+              </a:spcAft>
+            </a:pPr>
+            <a:r>
+              <a:rPr sz="1250" b="1">
+                <a:solidFill>
+                  <a:srgbClr val="7CB342"/>
+                </a:solidFill>
+                <a:latin typeface="Menlo"/>
+              </a:rPr>
+              <a:t>→  </a:t>
+            </a:r>
+            <a:r>
+              <a:rPr sz="1250">
+                <a:solidFill>
+                  <a:srgbClr val="F5EFE0"/>
+                </a:solidFill>
+                <a:latin typeface="Helvetica Neue"/>
+              </a:rPr>
+              <a:t>Duplicate-lead guard: 409 + field on email or name match.</a:t>
+            </a:r>
+          </a:p>
+          <a:p>
+            <a:pPr algn="l">
+              <a:lnSpc>
+                <a:spcPct val="118000"/>
+              </a:lnSpc>
+              <a:spcAft>
+                <a:spcPts val="600"/>
+              </a:spcAft>
+            </a:pPr>
+            <a:r>
+              <a:rPr sz="1250" b="1">
+                <a:solidFill>
+                  <a:srgbClr val="7CB342"/>
+                </a:solidFill>
+                <a:latin typeface="Menlo"/>
+              </a:rPr>
+              <a:t>→  </a:t>
+            </a:r>
+            <a:r>
+              <a:rPr sz="1250">
+                <a:solidFill>
+                  <a:srgbClr val="F5EFE0"/>
+                </a:solidFill>
+                <a:latin typeface="Helvetica Neue"/>
+              </a:rPr>
+              <a:t>GHL webhook fires only on save success — no dup double-posts.</a:t>
+            </a:r>
+          </a:p>
+          <a:p>
+            <a:pPr algn="l">
+              <a:lnSpc>
+                <a:spcPct val="118000"/>
+              </a:lnSpc>
+              <a:spcAft>
+                <a:spcPts val="600"/>
+              </a:spcAft>
+            </a:pPr>
+            <a:r>
+              <a:rPr sz="1250" b="1">
+                <a:solidFill>
+                  <a:srgbClr val="7CB342"/>
+                </a:solidFill>
+                <a:latin typeface="Menlo"/>
+              </a:rPr>
+              <a:t>→  </a:t>
+            </a:r>
+            <a:r>
+              <a:rPr sz="1250">
+                <a:solidFill>
+                  <a:srgbClr val="F5EFE0"/>
+                </a:solidFill>
+                <a:latin typeface="Helvetica Neue"/>
+              </a:rPr>
+              <a:t>Vercel auto-deploy from main (a3brands_analyzer repo).</a:t>
             </a:r>
           </a:p>
         </p:txBody>
@@ -8217,7 +8329,7 @@
                 </a:solidFill>
                 <a:latin typeface="Helvetica Neue"/>
               </a:rPr>
-              <a:t>Phase 2 persistence: works in dev only — JSON file won't survive a Vercel deploy.</a:t>
+              <a:t>Phase 2 persistence: NOW live on Vercel — JSON file store will not survive cold starts. Migration is urgent.</a:t>
             </a:r>
           </a:p>
           <a:p>
@@ -8301,7 +8413,7 @@
                 </a:solidFill>
                 <a:latin typeface="Helvetica Neue"/>
               </a:rPr>
-              <a:t>.env config: FIRECRAWL_API_KEY referenced in code but .env file is currently empty.</a:t>
+              <a:t>FIRECRAWL_API_KEY now set in Vercel; no rate limit or daily ceiling guards the endpoint.</a:t>
             </a:r>
           </a:p>
         </p:txBody>
@@ -8645,7 +8757,7 @@
                 </a:solidFill>
                 <a:latin typeface="Helvetica Neue"/>
               </a:rPr>
-              <a:t>Phase 1 was skipped on the way to building 3 + 4. The next-step slide tells you exactly how to backfill it.</a:t>
+              <a:t>v3: deploy is live — persistence + auth are now production gaps, not roadmap items.</a:t>
             </a:r>
           </a:p>
         </p:txBody>
@@ -15105,6 +15217,34 @@
             <a:spAutoFit/>
           </a:bodyPr>
           <a:lstStyle/>
+          <a:p>
+            <a:pPr algn="l">
+              <a:lnSpc>
+                <a:spcPct val="125000"/>
+              </a:lnSpc>
+              <a:spcAft>
+                <a:spcPts val="600"/>
+              </a:spcAft>
+            </a:pPr>
+            <a:r>
+              <a:rPr sz="1200" b="1">
+                <a:solidFill>
+                  <a:srgbClr val="7CB342"/>
+                </a:solidFill>
+                <a:latin typeface="Menlo"/>
+              </a:rPr>
+              <a:t>→  </a:t>
+            </a:r>
+            <a:r>
+              <a:rPr sz="1200">
+                <a:solidFill>
+                  <a:srgbClr val="F5EFE0"/>
+                </a:solidFill>
+                <a:latin typeface="Helvetica Neue"/>
+              </a:rPr>
+              <a:t>Dedup: findDuplicateLead() blocks same email or name (case-insensitive). 409 + field surfaced to UI.</a:t>
+            </a:r>
+          </a:p>
           <a:p>
             <a:pPr algn="l">
               <a:lnSpc>
